--- a/gallery/pptx/fixtures/27-accented-text.pptx
+++ b/gallery/pptx/fixtures/27-accented-text.pptx
@@ -9,6 +9,69 @@
 </p:presentation>
 </file>
 
-<file path=ppt/slides/slide1.xml><?xml version="1.0" encoding="UTF-8" standalone="yes"?>
-<p:sld xmlns:a="http://schemas.openxmlformats.org/drawingml/2006/main" xmlns:r="http://schemas.openxmlformats.org/officeDocument/2006/relationships" xmlns:p="http://schemas.openxmlformats.org/presentationml/2006/main"><p:cSld><p:spTree><p:nvGrpSpPr><p:cNvPr id="1" name=""/><p:cNvGrpSpPr/><p:nvPr/></p:nvGrpSpPr><p:grpSpPr/><p:sp><p:nvSpPr><p:cNvPr id="2" name="Raw"/><p:cNvSpPr txBox="1"/><p:nvPr/></p:nvSpPr><p:spPr><a:xfrm><a:off x="838200" y="838200"/><a:ext cx="7467600" cy="1000000"/></a:xfrm><a:prstGeom prst="rect"><a:avLst/></a:prstGeom></p:spPr><p:txBody><a:bodyPr/><a:lstStyle/><a:p><a:r><a:rPr lang="fi-FI" sz="2400"/><a:t>Hämeenlinna – Ærø & Ω</a:t></a:r></a:p></p:txBody></p:sp><p:sp><p:nvSpPr><p:cNvPr id="3" name="Escaped"/><p:cNvSpPr txBox="1"/><p:nvPr/></p:nvSpPr><p:spPr><a:xfrm><a:off x="838200" y="2200000"/><a:ext cx="7467600" cy="1000000"/></a:xfrm><a:prstGeom prst="rect"><a:avLst/></a:prstGeom></p:spPr><p:txBody><a:bodyPr/><a:lstStyle/><a:p><a:r><a:rPr lang="fi-FI" sz="2400"/><a:t>H&#228;meenlinna &#8211; &#xC6;r&#xF8; &amp; &#937;</a:t></a:r></a:p></p:txBody></p:sp></p:spTree></p:cSld></p:sld>
+<file path=ppt/slides/slide1.xml><?xml version="1.0" encoding="utf-8"?>
+<p:sld xmlns:a="http://schemas.openxmlformats.org/drawingml/2006/main" xmlns:r="http://schemas.openxmlformats.org/officeDocument/2006/relationships" xmlns:p="http://schemas.openxmlformats.org/presentationml/2006/main">
+  <p:cSld>
+    <p:spTree>
+      <p:nvGrpSpPr>
+        <p:cNvPr id="1" name=""/>
+        <p:cNvGrpSpPr/>
+        <p:nvPr/>
+      </p:nvGrpSpPr>
+      <p:grpSpPr/>
+      <p:sp>
+        <p:nvSpPr>
+          <p:cNvPr id="2" name="Raw"/>
+          <p:cNvSpPr txBox="1"/>
+          <p:nvPr/>
+        </p:nvSpPr>
+        <p:spPr>
+          <a:xfrm>
+            <a:off x="838200" y="838200"/>
+            <a:ext cx="7467600" cy="1000000"/>
+          </a:xfrm>
+          <a:prstGeom prst="rect">
+            <a:avLst/>
+          </a:prstGeom>
+        </p:spPr>
+        <p:txBody>
+          <a:bodyPr/>
+          <a:lstStyle/>
+          <a:p>
+            <a:r>
+              <a:rPr lang="fi-FI" sz="2400"/>
+              <a:t>Hämeenlinna – Ærø &amp; Ω</a:t>
+            </a:r>
+          </a:p>
+        </p:txBody>
+      </p:sp>
+      <p:sp>
+        <p:nvSpPr>
+          <p:cNvPr id="3" name="Escaped"/>
+          <p:cNvSpPr txBox="1"/>
+          <p:nvPr/>
+        </p:nvSpPr>
+        <p:spPr>
+          <a:xfrm>
+            <a:off x="838200" y="2200000"/>
+            <a:ext cx="7467600" cy="1000000"/>
+          </a:xfrm>
+          <a:prstGeom prst="rect">
+            <a:avLst/>
+          </a:prstGeom>
+        </p:spPr>
+        <p:txBody>
+          <a:bodyPr/>
+          <a:lstStyle/>
+          <a:p>
+            <a:r>
+              <a:rPr lang="fi-FI" sz="2400"/>
+              <a:t>Hämeenlinna – Ærø &amp; Ω</a:t>
+            </a:r>
+          </a:p>
+        </p:txBody>
+      </p:sp>
+    </p:spTree>
+  </p:cSld>
+</p:sld>
 </file>